--- a/doc/multimodal_discordance_v4_1.pptx
+++ b/doc/multimodal_discordance_v4_1.pptx
@@ -5,12 +5,14 @@
     <p:sldMasterId id="2147483648" r:id="rId1"/>
   </p:sldMasterIdLst>
   <p:notesMasterIdLst>
-    <p:notesMasterId r:id="rId5"/>
+    <p:notesMasterId r:id="rId7"/>
   </p:notesMasterIdLst>
   <p:sldIdLst>
     <p:sldId id="256" r:id="rId2"/>
     <p:sldId id="257" r:id="rId3"/>
     <p:sldId id="258" r:id="rId4"/>
+    <p:sldId id="259" r:id="rId5"/>
+    <p:sldId id="260" r:id="rId6"/>
   </p:sldIdLst>
   <p:sldSz cx="9144000" cy="5143500" type="screen16x9"/>
   <p:notesSz cx="5143500" cy="9144000"/>
@@ -112,6 +114,42 @@
     </p:ext>
   </p:extLst>
 </p:presentation>
+</file>
+
+<file path=ppt/revisionInfo.xml><?xml version="1.0" encoding="utf-8"?>
+<p1510:revInfo xmlns:a="http://schemas.openxmlformats.org/drawingml/2006/main" xmlns:r="http://schemas.openxmlformats.org/officeDocument/2006/relationships" xmlns:p1510="http://schemas.microsoft.com/office/powerpoint/2015/10/main">
+  <p1510:revLst>
+    <p1510:client id="{2F5CA917-40D4-2042-85C0-9308A5876FAF}" v="1" dt="2026-02-20T15:04:22.276"/>
+  </p1510:revLst>
+</p1510:revInfo>
+</file>
+
+<file path=ppt/changesInfos/changesInfo1.xml><?xml version="1.0" encoding="utf-8"?>
+<pc:chgInfo xmlns:a="http://schemas.openxmlformats.org/drawingml/2006/main" xmlns:r="http://schemas.openxmlformats.org/officeDocument/2006/relationships" xmlns:ac="http://schemas.microsoft.com/office/drawing/2013/main/command" xmlns:pc="http://schemas.microsoft.com/office/powerpoint/2013/main/command">
+  <pc:docChgLst>
+    <pc:chgData name="Takeshi Tohyama" userId="f3f3f24b-f493-4c0d-b5cc-fa587c121830" providerId="ADAL" clId="{0C5966F9-C313-55AB-9FDD-B40390BCAC97}"/>
+    <pc:docChg chg="addSld modSld">
+      <pc:chgData name="Takeshi Tohyama" userId="f3f3f24b-f493-4c0d-b5cc-fa587c121830" providerId="ADAL" clId="{0C5966F9-C313-55AB-9FDD-B40390BCAC97}" dt="2026-02-20T15:04:22.275" v="0"/>
+      <pc:docMkLst>
+        <pc:docMk/>
+      </pc:docMkLst>
+      <pc:sldChg chg="add">
+        <pc:chgData name="Takeshi Tohyama" userId="f3f3f24b-f493-4c0d-b5cc-fa587c121830" providerId="ADAL" clId="{0C5966F9-C313-55AB-9FDD-B40390BCAC97}" dt="2026-02-20T15:04:22.275" v="0"/>
+        <pc:sldMkLst>
+          <pc:docMk/>
+          <pc:sldMk cId="3255932196" sldId="259"/>
+        </pc:sldMkLst>
+      </pc:sldChg>
+      <pc:sldChg chg="add">
+        <pc:chgData name="Takeshi Tohyama" userId="f3f3f24b-f493-4c0d-b5cc-fa587c121830" providerId="ADAL" clId="{0C5966F9-C313-55AB-9FDD-B40390BCAC97}" dt="2026-02-20T15:04:22.275" v="0"/>
+        <pc:sldMkLst>
+          <pc:docMk/>
+          <pc:sldMk cId="1755191953" sldId="260"/>
+        </pc:sldMkLst>
+      </pc:sldChg>
+    </pc:docChg>
+  </pc:docChgLst>
+</pc:chgInfo>
 </file>
 
 <file path=ppt/notesMasters/notesMaster1.xml><?xml version="1.0" encoding="utf-8"?>
@@ -759,6 +797,424 @@
 </p:sldLayout>
 </file>
 
+<file path=ppt/slideLayouts/slideLayout2.xml><?xml version="1.0" encoding="utf-8"?>
+<p:sldLayout xmlns:a="http://schemas.openxmlformats.org/drawingml/2006/main" xmlns:r="http://schemas.openxmlformats.org/officeDocument/2006/relationships" xmlns:p="http://schemas.openxmlformats.org/presentationml/2006/main" type="title">
+  <p:cSld name="Title Slide">
+    <p:spTree>
+      <p:nvGrpSpPr>
+        <p:cNvPr id="1" name=""/>
+        <p:cNvGrpSpPr/>
+        <p:nvPr/>
+      </p:nvGrpSpPr>
+      <p:grpSpPr>
+        <a:xfrm>
+          <a:off x="0" y="0"/>
+          <a:ext cx="0" cy="0"/>
+          <a:chOff x="0" y="0"/>
+          <a:chExt cx="0" cy="0"/>
+        </a:xfrm>
+      </p:grpSpPr>
+      <p:sp>
+        <p:nvSpPr>
+          <p:cNvPr id="2" name="Title 1">
+            <a:extLst>
+              <a:ext uri="{FF2B5EF4-FFF2-40B4-BE49-F238E27FC236}">
+                <a16:creationId xmlns:a16="http://schemas.microsoft.com/office/drawing/2014/main" id="{39D65C2D-DAEC-D59B-FA9A-93E1C406CDB9}"/>
+              </a:ext>
+            </a:extLst>
+          </p:cNvPr>
+          <p:cNvSpPr>
+            <a:spLocks noGrp="1"/>
+          </p:cNvSpPr>
+          <p:nvPr>
+            <p:ph type="ctrTitle"/>
+          </p:nvPr>
+        </p:nvSpPr>
+        <p:spPr>
+          <a:xfrm>
+            <a:off x="1143000" y="841772"/>
+            <a:ext cx="6858000" cy="1790700"/>
+          </a:xfrm>
+        </p:spPr>
+        <p:txBody>
+          <a:bodyPr anchor="b"/>
+          <a:lstStyle>
+            <a:lvl1pPr algn="ctr">
+              <a:defRPr sz="4500"/>
+            </a:lvl1pPr>
+          </a:lstStyle>
+          <a:p>
+            <a:r>
+              <a:rPr lang="en-US"/>
+              <a:t>Click to edit Master title style</a:t>
+            </a:r>
+          </a:p>
+        </p:txBody>
+      </p:sp>
+      <p:sp>
+        <p:nvSpPr>
+          <p:cNvPr id="3" name="Subtitle 2">
+            <a:extLst>
+              <a:ext uri="{FF2B5EF4-FFF2-40B4-BE49-F238E27FC236}">
+                <a16:creationId xmlns:a16="http://schemas.microsoft.com/office/drawing/2014/main" id="{A355EB40-6729-ABBE-2F64-F4CE31820068}"/>
+              </a:ext>
+            </a:extLst>
+          </p:cNvPr>
+          <p:cNvSpPr>
+            <a:spLocks noGrp="1"/>
+          </p:cNvSpPr>
+          <p:nvPr>
+            <p:ph type="subTitle" idx="1"/>
+          </p:nvPr>
+        </p:nvSpPr>
+        <p:spPr>
+          <a:xfrm>
+            <a:off x="1143000" y="2701528"/>
+            <a:ext cx="6858000" cy="1241822"/>
+          </a:xfrm>
+        </p:spPr>
+        <p:txBody>
+          <a:bodyPr/>
+          <a:lstStyle>
+            <a:lvl1pPr marL="0" indent="0" algn="ctr">
+              <a:buNone/>
+              <a:defRPr sz="1800"/>
+            </a:lvl1pPr>
+            <a:lvl2pPr marL="342900" indent="0" algn="ctr">
+              <a:buNone/>
+              <a:defRPr sz="1500"/>
+            </a:lvl2pPr>
+            <a:lvl3pPr marL="685800" indent="0" algn="ctr">
+              <a:buNone/>
+              <a:defRPr sz="1350"/>
+            </a:lvl3pPr>
+            <a:lvl4pPr marL="1028700" indent="0" algn="ctr">
+              <a:buNone/>
+              <a:defRPr sz="1200"/>
+            </a:lvl4pPr>
+            <a:lvl5pPr marL="1371600" indent="0" algn="ctr">
+              <a:buNone/>
+              <a:defRPr sz="1200"/>
+            </a:lvl5pPr>
+            <a:lvl6pPr marL="1714500" indent="0" algn="ctr">
+              <a:buNone/>
+              <a:defRPr sz="1200"/>
+            </a:lvl6pPr>
+            <a:lvl7pPr marL="2057400" indent="0" algn="ctr">
+              <a:buNone/>
+              <a:defRPr sz="1200"/>
+            </a:lvl7pPr>
+            <a:lvl8pPr marL="2400300" indent="0" algn="ctr">
+              <a:buNone/>
+              <a:defRPr sz="1200"/>
+            </a:lvl8pPr>
+            <a:lvl9pPr marL="2743200" indent="0" algn="ctr">
+              <a:buNone/>
+              <a:defRPr sz="1200"/>
+            </a:lvl9pPr>
+          </a:lstStyle>
+          <a:p>
+            <a:r>
+              <a:rPr lang="en-US"/>
+              <a:t>Click to edit Master subtitle style</a:t>
+            </a:r>
+          </a:p>
+        </p:txBody>
+      </p:sp>
+      <p:sp>
+        <p:nvSpPr>
+          <p:cNvPr id="4" name="Date Placeholder 3">
+            <a:extLst>
+              <a:ext uri="{FF2B5EF4-FFF2-40B4-BE49-F238E27FC236}">
+                <a16:creationId xmlns:a16="http://schemas.microsoft.com/office/drawing/2014/main" id="{484E13B8-A16D-54AB-2198-4F526A76E423}"/>
+              </a:ext>
+            </a:extLst>
+          </p:cNvPr>
+          <p:cNvSpPr>
+            <a:spLocks noGrp="1"/>
+          </p:cNvSpPr>
+          <p:nvPr>
+            <p:ph type="dt" sz="half" idx="10"/>
+          </p:nvPr>
+        </p:nvSpPr>
+        <p:spPr/>
+        <p:txBody>
+          <a:bodyPr/>
+          <a:lstStyle/>
+          <a:p>
+            <a:fld id="{812E2C80-DBBC-ED4D-85BA-9201037B83E1}" type="datetimeFigureOut">
+              <a:rPr lang="en-US" smtClean="0"/>
+              <a:t>2/20/26</a:t>
+            </a:fld>
+            <a:endParaRPr lang="en-US"/>
+          </a:p>
+        </p:txBody>
+      </p:sp>
+      <p:sp>
+        <p:nvSpPr>
+          <p:cNvPr id="5" name="Footer Placeholder 4">
+            <a:extLst>
+              <a:ext uri="{FF2B5EF4-FFF2-40B4-BE49-F238E27FC236}">
+                <a16:creationId xmlns:a16="http://schemas.microsoft.com/office/drawing/2014/main" id="{19006DB3-48D4-8616-519D-4EC2389E6D9E}"/>
+              </a:ext>
+            </a:extLst>
+          </p:cNvPr>
+          <p:cNvSpPr>
+            <a:spLocks noGrp="1"/>
+          </p:cNvSpPr>
+          <p:nvPr>
+            <p:ph type="ftr" sz="quarter" idx="11"/>
+          </p:nvPr>
+        </p:nvSpPr>
+        <p:spPr/>
+        <p:txBody>
+          <a:bodyPr/>
+          <a:lstStyle/>
+          <a:p>
+            <a:endParaRPr lang="en-US"/>
+          </a:p>
+        </p:txBody>
+      </p:sp>
+      <p:sp>
+        <p:nvSpPr>
+          <p:cNvPr id="6" name="Slide Number Placeholder 5">
+            <a:extLst>
+              <a:ext uri="{FF2B5EF4-FFF2-40B4-BE49-F238E27FC236}">
+                <a16:creationId xmlns:a16="http://schemas.microsoft.com/office/drawing/2014/main" id="{EEC52F43-3ACD-E9D2-B407-4DD887BD8B44}"/>
+              </a:ext>
+            </a:extLst>
+          </p:cNvPr>
+          <p:cNvSpPr>
+            <a:spLocks noGrp="1"/>
+          </p:cNvSpPr>
+          <p:nvPr>
+            <p:ph type="sldNum" sz="quarter" idx="12"/>
+          </p:nvPr>
+        </p:nvSpPr>
+        <p:spPr/>
+        <p:txBody>
+          <a:bodyPr/>
+          <a:lstStyle/>
+          <a:p>
+            <a:fld id="{2B81DB1C-D959-6A41-8708-704F06BC7B64}" type="slidenum">
+              <a:rPr lang="en-US" smtClean="0"/>
+              <a:t>‹#›</a:t>
+            </a:fld>
+            <a:endParaRPr lang="en-US"/>
+          </a:p>
+        </p:txBody>
+      </p:sp>
+    </p:spTree>
+    <p:extLst>
+      <p:ext uri="{BB962C8B-B14F-4D97-AF65-F5344CB8AC3E}">
+        <p14:creationId xmlns:p14="http://schemas.microsoft.com/office/powerpoint/2010/main" val="760098168"/>
+      </p:ext>
+    </p:extLst>
+  </p:cSld>
+  <p:clrMapOvr>
+    <a:masterClrMapping/>
+  </p:clrMapOvr>
+</p:sldLayout>
+</file>
+
+<file path=ppt/slideLayouts/slideLayout3.xml><?xml version="1.0" encoding="utf-8"?>
+<p:sldLayout xmlns:a="http://schemas.openxmlformats.org/drawingml/2006/main" xmlns:r="http://schemas.openxmlformats.org/officeDocument/2006/relationships" xmlns:p="http://schemas.openxmlformats.org/presentationml/2006/main" type="obj">
+  <p:cSld name="Title and Content">
+    <p:spTree>
+      <p:nvGrpSpPr>
+        <p:cNvPr id="1" name=""/>
+        <p:cNvGrpSpPr/>
+        <p:nvPr/>
+      </p:nvGrpSpPr>
+      <p:grpSpPr>
+        <a:xfrm>
+          <a:off x="0" y="0"/>
+          <a:ext cx="0" cy="0"/>
+          <a:chOff x="0" y="0"/>
+          <a:chExt cx="0" cy="0"/>
+        </a:xfrm>
+      </p:grpSpPr>
+      <p:sp>
+        <p:nvSpPr>
+          <p:cNvPr id="2" name="Title 1">
+            <a:extLst>
+              <a:ext uri="{FF2B5EF4-FFF2-40B4-BE49-F238E27FC236}">
+                <a16:creationId xmlns:a16="http://schemas.microsoft.com/office/drawing/2014/main" id="{90BB11CD-D11F-E629-C8E0-A14BF3E52BA0}"/>
+              </a:ext>
+            </a:extLst>
+          </p:cNvPr>
+          <p:cNvSpPr>
+            <a:spLocks noGrp="1"/>
+          </p:cNvSpPr>
+          <p:nvPr>
+            <p:ph type="title"/>
+          </p:nvPr>
+        </p:nvSpPr>
+        <p:spPr/>
+        <p:txBody>
+          <a:bodyPr/>
+          <a:lstStyle/>
+          <a:p>
+            <a:r>
+              <a:rPr lang="en-US"/>
+              <a:t>Click to edit Master title style</a:t>
+            </a:r>
+          </a:p>
+        </p:txBody>
+      </p:sp>
+      <p:sp>
+        <p:nvSpPr>
+          <p:cNvPr id="3" name="Content Placeholder 2">
+            <a:extLst>
+              <a:ext uri="{FF2B5EF4-FFF2-40B4-BE49-F238E27FC236}">
+                <a16:creationId xmlns:a16="http://schemas.microsoft.com/office/drawing/2014/main" id="{7E1156AB-2E80-DCD4-04EF-E411D2C5774F}"/>
+              </a:ext>
+            </a:extLst>
+          </p:cNvPr>
+          <p:cNvSpPr>
+            <a:spLocks noGrp="1"/>
+          </p:cNvSpPr>
+          <p:nvPr>
+            <p:ph idx="1"/>
+          </p:nvPr>
+        </p:nvSpPr>
+        <p:spPr/>
+        <p:txBody>
+          <a:bodyPr/>
+          <a:lstStyle/>
+          <a:p>
+            <a:pPr lvl="0"/>
+            <a:r>
+              <a:rPr lang="en-US"/>
+              <a:t>Click to edit Master text styles</a:t>
+            </a:r>
+          </a:p>
+          <a:p>
+            <a:pPr lvl="1"/>
+            <a:r>
+              <a:rPr lang="en-US"/>
+              <a:t>Second level</a:t>
+            </a:r>
+          </a:p>
+          <a:p>
+            <a:pPr lvl="2"/>
+            <a:r>
+              <a:rPr lang="en-US"/>
+              <a:t>Third level</a:t>
+            </a:r>
+          </a:p>
+          <a:p>
+            <a:pPr lvl="3"/>
+            <a:r>
+              <a:rPr lang="en-US"/>
+              <a:t>Fourth level</a:t>
+            </a:r>
+          </a:p>
+          <a:p>
+            <a:pPr lvl="4"/>
+            <a:r>
+              <a:rPr lang="en-US"/>
+              <a:t>Fifth level</a:t>
+            </a:r>
+          </a:p>
+        </p:txBody>
+      </p:sp>
+      <p:sp>
+        <p:nvSpPr>
+          <p:cNvPr id="4" name="Date Placeholder 3">
+            <a:extLst>
+              <a:ext uri="{FF2B5EF4-FFF2-40B4-BE49-F238E27FC236}">
+                <a16:creationId xmlns:a16="http://schemas.microsoft.com/office/drawing/2014/main" id="{FD8034DA-FF17-5B8E-DC12-F9CEA710D42B}"/>
+              </a:ext>
+            </a:extLst>
+          </p:cNvPr>
+          <p:cNvSpPr>
+            <a:spLocks noGrp="1"/>
+          </p:cNvSpPr>
+          <p:nvPr>
+            <p:ph type="dt" sz="half" idx="10"/>
+          </p:nvPr>
+        </p:nvSpPr>
+        <p:spPr/>
+        <p:txBody>
+          <a:bodyPr/>
+          <a:lstStyle/>
+          <a:p>
+            <a:fld id="{812E2C80-DBBC-ED4D-85BA-9201037B83E1}" type="datetimeFigureOut">
+              <a:rPr lang="en-US" smtClean="0"/>
+              <a:t>2/20/26</a:t>
+            </a:fld>
+            <a:endParaRPr lang="en-US"/>
+          </a:p>
+        </p:txBody>
+      </p:sp>
+      <p:sp>
+        <p:nvSpPr>
+          <p:cNvPr id="5" name="Footer Placeholder 4">
+            <a:extLst>
+              <a:ext uri="{FF2B5EF4-FFF2-40B4-BE49-F238E27FC236}">
+                <a16:creationId xmlns:a16="http://schemas.microsoft.com/office/drawing/2014/main" id="{CCADFEE8-6305-4AFE-B060-8F2EEE170D90}"/>
+              </a:ext>
+            </a:extLst>
+          </p:cNvPr>
+          <p:cNvSpPr>
+            <a:spLocks noGrp="1"/>
+          </p:cNvSpPr>
+          <p:nvPr>
+            <p:ph type="ftr" sz="quarter" idx="11"/>
+          </p:nvPr>
+        </p:nvSpPr>
+        <p:spPr/>
+        <p:txBody>
+          <a:bodyPr/>
+          <a:lstStyle/>
+          <a:p>
+            <a:endParaRPr lang="en-US"/>
+          </a:p>
+        </p:txBody>
+      </p:sp>
+      <p:sp>
+        <p:nvSpPr>
+          <p:cNvPr id="6" name="Slide Number Placeholder 5">
+            <a:extLst>
+              <a:ext uri="{FF2B5EF4-FFF2-40B4-BE49-F238E27FC236}">
+                <a16:creationId xmlns:a16="http://schemas.microsoft.com/office/drawing/2014/main" id="{599D5B97-9D91-C274-D5B2-D55A52155014}"/>
+              </a:ext>
+            </a:extLst>
+          </p:cNvPr>
+          <p:cNvSpPr>
+            <a:spLocks noGrp="1"/>
+          </p:cNvSpPr>
+          <p:nvPr>
+            <p:ph type="sldNum" sz="quarter" idx="12"/>
+          </p:nvPr>
+        </p:nvSpPr>
+        <p:spPr/>
+        <p:txBody>
+          <a:bodyPr/>
+          <a:lstStyle/>
+          <a:p>
+            <a:fld id="{2B81DB1C-D959-6A41-8708-704F06BC7B64}" type="slidenum">
+              <a:rPr lang="en-US" smtClean="0"/>
+              <a:t>‹#›</a:t>
+            </a:fld>
+            <a:endParaRPr lang="en-US"/>
+          </a:p>
+        </p:txBody>
+      </p:sp>
+    </p:spTree>
+    <p:extLst>
+      <p:ext uri="{BB962C8B-B14F-4D97-AF65-F5344CB8AC3E}">
+        <p14:creationId xmlns:p14="http://schemas.microsoft.com/office/powerpoint/2010/main" val="849700989"/>
+      </p:ext>
+    </p:extLst>
+  </p:cSld>
+  <p:clrMapOvr>
+    <a:masterClrMapping/>
+  </p:clrMapOvr>
+</p:sldLayout>
+</file>
+
 <file path=ppt/slideMasters/slideMaster1.xml><?xml version="1.0" encoding="utf-8"?>
 <p:sldMaster xmlns:a="http://schemas.openxmlformats.org/drawingml/2006/main" xmlns:r="http://schemas.openxmlformats.org/officeDocument/2006/relationships" xmlns:p="http://schemas.openxmlformats.org/presentationml/2006/main">
   <p:cSld>
@@ -786,6 +1242,8 @@
   <p:clrMap bg1="lt1" tx1="dk1" bg2="lt2" tx2="dk2" accent1="accent1" accent2="accent2" accent3="accent3" accent4="accent4" accent5="accent5" accent6="accent6" hlink="hlink" folHlink="folHlink"/>
   <p:sldLayoutIdLst>
     <p:sldLayoutId id="2147483649" r:id="rId1"/>
+    <p:sldLayoutId id="2147483650" r:id="rId2"/>
+    <p:sldLayoutId id="2147483651" r:id="rId3"/>
   </p:sldLayoutIdLst>
   <p:hf sldNum="0" hdr="0" ftr="0" dt="0"/>
   <p:txStyles>
@@ -3521,6 +3979,700 @@
         </p:txBody>
       </p:sp>
     </p:spTree>
+  </p:cSld>
+  <p:clrMapOvr>
+    <a:masterClrMapping/>
+  </p:clrMapOvr>
+</p:sld>
+</file>
+
+<file path=ppt/slides/slide4.xml><?xml version="1.0" encoding="utf-8"?>
+<p:sld xmlns:a="http://schemas.openxmlformats.org/drawingml/2006/main" xmlns:r="http://schemas.openxmlformats.org/officeDocument/2006/relationships" xmlns:p="http://schemas.openxmlformats.org/presentationml/2006/main">
+  <p:cSld>
+    <p:spTree>
+      <p:nvGrpSpPr>
+        <p:cNvPr id="1" name=""/>
+        <p:cNvGrpSpPr/>
+        <p:nvPr/>
+      </p:nvGrpSpPr>
+      <p:grpSpPr>
+        <a:xfrm>
+          <a:off x="0" y="0"/>
+          <a:ext cx="0" cy="0"/>
+          <a:chOff x="0" y="0"/>
+          <a:chExt cx="0" cy="0"/>
+        </a:xfrm>
+      </p:grpSpPr>
+      <p:pic>
+        <p:nvPicPr>
+          <p:cNvPr id="5" name="Picture 4">
+            <a:extLst>
+              <a:ext uri="{FF2B5EF4-FFF2-40B4-BE49-F238E27FC236}">
+                <a16:creationId xmlns:a16="http://schemas.microsoft.com/office/drawing/2014/main" id="{156C2CB6-21F2-2EDD-AFFB-237E78F66F30}"/>
+              </a:ext>
+            </a:extLst>
+          </p:cNvPr>
+          <p:cNvPicPr>
+            <a:picLocks noChangeAspect="1"/>
+          </p:cNvPicPr>
+          <p:nvPr/>
+        </p:nvPicPr>
+        <p:blipFill>
+          <a:blip r:embed="rId2">
+            <a:duotone>
+              <a:prstClr val="black"/>
+              <a:schemeClr val="tx2">
+                <a:lumMod val="90000"/>
+                <a:tint val="45000"/>
+                <a:satMod val="400000"/>
+              </a:schemeClr>
+            </a:duotone>
+            <a:extLst>
+              <a:ext uri="{BEBA8EAE-BF5A-486C-A8C5-ECC9F3942E4B}">
+                <a14:imgProps xmlns:a14="http://schemas.microsoft.com/office/drawing/2010/main">
+                  <a14:imgLayer r:embed="rId3">
+                    <a14:imgEffect>
+                      <a14:artisticPhotocopy/>
+                    </a14:imgEffect>
+                    <a14:imgEffect>
+                      <a14:sharpenSoften amount="50000"/>
+                    </a14:imgEffect>
+                    <a14:imgEffect>
+                      <a14:colorTemperature colorTemp="4700"/>
+                    </a14:imgEffect>
+                    <a14:imgEffect>
+                      <a14:saturation sat="0"/>
+                    </a14:imgEffect>
+                    <a14:imgEffect>
+                      <a14:brightnessContrast bright="20000" contrast="-40000"/>
+                    </a14:imgEffect>
+                  </a14:imgLayer>
+                </a14:imgProps>
+              </a:ext>
+            </a:extLst>
+          </a:blip>
+          <a:stretch>
+            <a:fillRect/>
+          </a:stretch>
+        </p:blipFill>
+        <p:spPr>
+          <a:xfrm>
+            <a:off x="1996157" y="1428827"/>
+            <a:ext cx="810000" cy="810000"/>
+          </a:xfrm>
+          <a:prstGeom prst="rect">
+            <a:avLst/>
+          </a:prstGeom>
+        </p:spPr>
+      </p:pic>
+      <p:pic>
+        <p:nvPicPr>
+          <p:cNvPr id="6" name="Picture 5">
+            <a:extLst>
+              <a:ext uri="{FF2B5EF4-FFF2-40B4-BE49-F238E27FC236}">
+                <a16:creationId xmlns:a16="http://schemas.microsoft.com/office/drawing/2014/main" id="{84CEDDB9-2AE0-38F1-E086-8C6FC3DB3D89}"/>
+              </a:ext>
+            </a:extLst>
+          </p:cNvPr>
+          <p:cNvPicPr>
+            <a:picLocks noChangeAspect="1"/>
+          </p:cNvPicPr>
+          <p:nvPr/>
+        </p:nvPicPr>
+        <p:blipFill>
+          <a:blip r:embed="rId4">
+            <a:duotone>
+              <a:schemeClr val="accent5">
+                <a:shade val="45000"/>
+                <a:satMod val="135000"/>
+              </a:schemeClr>
+              <a:prstClr val="white"/>
+            </a:duotone>
+          </a:blip>
+          <a:stretch>
+            <a:fillRect/>
+          </a:stretch>
+        </p:blipFill>
+        <p:spPr>
+          <a:xfrm>
+            <a:off x="1508234" y="2706204"/>
+            <a:ext cx="810000" cy="810000"/>
+          </a:xfrm>
+          <a:prstGeom prst="rect">
+            <a:avLst/>
+          </a:prstGeom>
+        </p:spPr>
+      </p:pic>
+      <p:pic>
+        <p:nvPicPr>
+          <p:cNvPr id="7" name="Picture 6">
+            <a:extLst>
+              <a:ext uri="{FF2B5EF4-FFF2-40B4-BE49-F238E27FC236}">
+                <a16:creationId xmlns:a16="http://schemas.microsoft.com/office/drawing/2014/main" id="{4415EA3A-A1C2-B63B-3012-55189FDE202D}"/>
+              </a:ext>
+            </a:extLst>
+          </p:cNvPr>
+          <p:cNvPicPr>
+            <a:picLocks noChangeAspect="1"/>
+          </p:cNvPicPr>
+          <p:nvPr/>
+        </p:nvPicPr>
+        <p:blipFill>
+          <a:blip r:embed="rId5">
+            <a:duotone>
+              <a:schemeClr val="accent3">
+                <a:shade val="45000"/>
+                <a:satMod val="135000"/>
+              </a:schemeClr>
+              <a:prstClr val="white"/>
+            </a:duotone>
+          </a:blip>
+          <a:stretch>
+            <a:fillRect/>
+          </a:stretch>
+        </p:blipFill>
+        <p:spPr>
+          <a:xfrm>
+            <a:off x="2526476" y="2706204"/>
+            <a:ext cx="810000" cy="810000"/>
+          </a:xfrm>
+          <a:prstGeom prst="rect">
+            <a:avLst/>
+          </a:prstGeom>
+        </p:spPr>
+      </p:pic>
+      <p:pic>
+        <p:nvPicPr>
+          <p:cNvPr id="8" name="Picture 7">
+            <a:extLst>
+              <a:ext uri="{FF2B5EF4-FFF2-40B4-BE49-F238E27FC236}">
+                <a16:creationId xmlns:a16="http://schemas.microsoft.com/office/drawing/2014/main" id="{C12411E2-1371-894F-A4B3-1378485F3095}"/>
+              </a:ext>
+            </a:extLst>
+          </p:cNvPr>
+          <p:cNvPicPr>
+            <a:picLocks noChangeAspect="1"/>
+          </p:cNvPicPr>
+          <p:nvPr/>
+        </p:nvPicPr>
+        <p:blipFill>
+          <a:blip r:embed="rId2">
+            <a:duotone>
+              <a:prstClr val="black"/>
+              <a:schemeClr val="tx2">
+                <a:lumMod val="90000"/>
+                <a:tint val="45000"/>
+                <a:satMod val="400000"/>
+              </a:schemeClr>
+            </a:duotone>
+            <a:extLst>
+              <a:ext uri="{BEBA8EAE-BF5A-486C-A8C5-ECC9F3942E4B}">
+                <a14:imgProps xmlns:a14="http://schemas.microsoft.com/office/drawing/2010/main">
+                  <a14:imgLayer r:embed="rId3">
+                    <a14:imgEffect>
+                      <a14:artisticPhotocopy/>
+                    </a14:imgEffect>
+                    <a14:imgEffect>
+                      <a14:sharpenSoften amount="50000"/>
+                    </a14:imgEffect>
+                    <a14:imgEffect>
+                      <a14:colorTemperature colorTemp="4700"/>
+                    </a14:imgEffect>
+                    <a14:imgEffect>
+                      <a14:saturation sat="0"/>
+                    </a14:imgEffect>
+                    <a14:imgEffect>
+                      <a14:brightnessContrast bright="20000" contrast="-40000"/>
+                    </a14:imgEffect>
+                  </a14:imgLayer>
+                </a14:imgProps>
+              </a:ext>
+            </a:extLst>
+          </a:blip>
+          <a:stretch>
+            <a:fillRect/>
+          </a:stretch>
+        </p:blipFill>
+        <p:spPr>
+          <a:xfrm>
+            <a:off x="6420768" y="1428827"/>
+            <a:ext cx="810000" cy="810000"/>
+          </a:xfrm>
+          <a:prstGeom prst="rect">
+            <a:avLst/>
+          </a:prstGeom>
+        </p:spPr>
+      </p:pic>
+      <p:pic>
+        <p:nvPicPr>
+          <p:cNvPr id="9" name="Picture 8">
+            <a:extLst>
+              <a:ext uri="{FF2B5EF4-FFF2-40B4-BE49-F238E27FC236}">
+                <a16:creationId xmlns:a16="http://schemas.microsoft.com/office/drawing/2014/main" id="{DF239A14-23F6-774C-99FD-D7715E8A87CA}"/>
+              </a:ext>
+            </a:extLst>
+          </p:cNvPr>
+          <p:cNvPicPr>
+            <a:picLocks noChangeAspect="1"/>
+          </p:cNvPicPr>
+          <p:nvPr/>
+        </p:nvPicPr>
+        <p:blipFill>
+          <a:blip r:embed="rId4">
+            <a:duotone>
+              <a:schemeClr val="accent5">
+                <a:shade val="45000"/>
+                <a:satMod val="135000"/>
+              </a:schemeClr>
+              <a:prstClr val="white"/>
+            </a:duotone>
+          </a:blip>
+          <a:stretch>
+            <a:fillRect/>
+          </a:stretch>
+        </p:blipFill>
+        <p:spPr>
+          <a:xfrm>
+            <a:off x="5932844" y="2706204"/>
+            <a:ext cx="810000" cy="810000"/>
+          </a:xfrm>
+          <a:prstGeom prst="rect">
+            <a:avLst/>
+          </a:prstGeom>
+        </p:spPr>
+      </p:pic>
+      <p:pic>
+        <p:nvPicPr>
+          <p:cNvPr id="10" name="Picture 9">
+            <a:extLst>
+              <a:ext uri="{FF2B5EF4-FFF2-40B4-BE49-F238E27FC236}">
+                <a16:creationId xmlns:a16="http://schemas.microsoft.com/office/drawing/2014/main" id="{D4DF51B4-DF58-C629-D9CE-4BCED8A445AF}"/>
+              </a:ext>
+            </a:extLst>
+          </p:cNvPr>
+          <p:cNvPicPr>
+            <a:picLocks noChangeAspect="1"/>
+          </p:cNvPicPr>
+          <p:nvPr/>
+        </p:nvPicPr>
+        <p:blipFill>
+          <a:blip r:embed="rId5">
+            <a:duotone>
+              <a:schemeClr val="accent3">
+                <a:shade val="45000"/>
+                <a:satMod val="135000"/>
+              </a:schemeClr>
+              <a:prstClr val="white"/>
+            </a:duotone>
+          </a:blip>
+          <a:stretch>
+            <a:fillRect/>
+          </a:stretch>
+        </p:blipFill>
+        <p:spPr>
+          <a:xfrm>
+            <a:off x="6951086" y="2706204"/>
+            <a:ext cx="810000" cy="810000"/>
+          </a:xfrm>
+          <a:prstGeom prst="rect">
+            <a:avLst/>
+          </a:prstGeom>
+        </p:spPr>
+      </p:pic>
+      <p:sp>
+        <p:nvSpPr>
+          <p:cNvPr id="13" name="TextBox 12">
+            <a:extLst>
+              <a:ext uri="{FF2B5EF4-FFF2-40B4-BE49-F238E27FC236}">
+                <a16:creationId xmlns:a16="http://schemas.microsoft.com/office/drawing/2014/main" id="{E82E4941-DBD7-3C22-B2F7-3DA352DB2CB3}"/>
+              </a:ext>
+            </a:extLst>
+          </p:cNvPr>
+          <p:cNvSpPr txBox="1"/>
+          <p:nvPr/>
+        </p:nvSpPr>
+        <p:spPr>
+          <a:xfrm>
+            <a:off x="1292632" y="822950"/>
+            <a:ext cx="2051203" cy="369332"/>
+          </a:xfrm>
+          <a:prstGeom prst="rect">
+            <a:avLst/>
+          </a:prstGeom>
+          <a:noFill/>
+        </p:spPr>
+        <p:txBody>
+          <a:bodyPr wrap="square">
+            <a:spAutoFit/>
+          </a:bodyPr>
+          <a:lstStyle/>
+          <a:p>
+            <a:pPr algn="ctr"/>
+            <a:r>
+              <a:rPr lang="en-US" dirty="0"/>
+              <a:t>Exacerbated state</a:t>
+            </a:r>
+          </a:p>
+        </p:txBody>
+      </p:sp>
+      <p:sp>
+        <p:nvSpPr>
+          <p:cNvPr id="15" name="TextBox 14">
+            <a:extLst>
+              <a:ext uri="{FF2B5EF4-FFF2-40B4-BE49-F238E27FC236}">
+                <a16:creationId xmlns:a16="http://schemas.microsoft.com/office/drawing/2014/main" id="{4E0594AD-8250-16FF-B09F-05314BFC5A90}"/>
+              </a:ext>
+            </a:extLst>
+          </p:cNvPr>
+          <p:cNvSpPr txBox="1"/>
+          <p:nvPr/>
+        </p:nvSpPr>
+        <p:spPr>
+          <a:xfrm>
+            <a:off x="5802000" y="822950"/>
+            <a:ext cx="1881689" cy="369332"/>
+          </a:xfrm>
+          <a:prstGeom prst="rect">
+            <a:avLst/>
+          </a:prstGeom>
+          <a:noFill/>
+        </p:spPr>
+        <p:txBody>
+          <a:bodyPr wrap="square">
+            <a:spAutoFit/>
+          </a:bodyPr>
+          <a:lstStyle/>
+          <a:p>
+            <a:pPr algn="ctr"/>
+            <a:r>
+              <a:rPr lang="en-US" dirty="0"/>
+              <a:t>Recovered state</a:t>
+            </a:r>
+          </a:p>
+        </p:txBody>
+      </p:sp>
+      <p:cxnSp>
+        <p:nvCxnSpPr>
+          <p:cNvPr id="17" name="Straight Arrow Connector 16">
+            <a:extLst>
+              <a:ext uri="{FF2B5EF4-FFF2-40B4-BE49-F238E27FC236}">
+                <a16:creationId xmlns:a16="http://schemas.microsoft.com/office/drawing/2014/main" id="{15A19C1D-DB3D-A724-B22A-8E179CE303EB}"/>
+              </a:ext>
+            </a:extLst>
+          </p:cNvPr>
+          <p:cNvCxnSpPr/>
+          <p:nvPr/>
+        </p:nvCxnSpPr>
+        <p:spPr>
+          <a:xfrm>
+            <a:off x="3197646" y="1833827"/>
+            <a:ext cx="2604354" cy="0"/>
+          </a:xfrm>
+          <a:prstGeom prst="straightConnector1">
+            <a:avLst/>
+          </a:prstGeom>
+          <a:ln w="38100">
+            <a:headEnd type="triangle"/>
+            <a:tailEnd type="triangle"/>
+          </a:ln>
+        </p:spPr>
+        <p:style>
+          <a:lnRef idx="2">
+            <a:schemeClr val="accent1"/>
+          </a:lnRef>
+          <a:fillRef idx="0">
+            <a:schemeClr val="accent1"/>
+          </a:fillRef>
+          <a:effectRef idx="1">
+            <a:schemeClr val="accent1"/>
+          </a:effectRef>
+          <a:fontRef idx="minor">
+            <a:schemeClr val="tx1"/>
+          </a:fontRef>
+        </p:style>
+      </p:cxnSp>
+      <p:sp>
+        <p:nvSpPr>
+          <p:cNvPr id="18" name="TextBox 17">
+            <a:extLst>
+              <a:ext uri="{FF2B5EF4-FFF2-40B4-BE49-F238E27FC236}">
+                <a16:creationId xmlns:a16="http://schemas.microsoft.com/office/drawing/2014/main" id="{120E4E53-690B-86F9-AC0A-2316C040528E}"/>
+              </a:ext>
+            </a:extLst>
+          </p:cNvPr>
+          <p:cNvSpPr txBox="1"/>
+          <p:nvPr/>
+        </p:nvSpPr>
+        <p:spPr>
+          <a:xfrm>
+            <a:off x="3992956" y="1993016"/>
+            <a:ext cx="1275606" cy="300082"/>
+          </a:xfrm>
+          <a:prstGeom prst="rect">
+            <a:avLst/>
+          </a:prstGeom>
+          <a:noFill/>
+        </p:spPr>
+        <p:txBody>
+          <a:bodyPr wrap="none" rtlCol="0">
+            <a:spAutoFit/>
+          </a:bodyPr>
+          <a:lstStyle/>
+          <a:p>
+            <a:r>
+              <a:rPr lang="en-US" sz="1350" dirty="0"/>
+              <a:t>More than 72 h</a:t>
+            </a:r>
+          </a:p>
+        </p:txBody>
+      </p:sp>
+      <p:sp>
+        <p:nvSpPr>
+          <p:cNvPr id="19" name="TextBox 18">
+            <a:extLst>
+              <a:ext uri="{FF2B5EF4-FFF2-40B4-BE49-F238E27FC236}">
+                <a16:creationId xmlns:a16="http://schemas.microsoft.com/office/drawing/2014/main" id="{00565341-85A7-65E6-E994-78C2DC59D3D0}"/>
+              </a:ext>
+            </a:extLst>
+          </p:cNvPr>
+          <p:cNvSpPr txBox="1"/>
+          <p:nvPr/>
+        </p:nvSpPr>
+        <p:spPr>
+          <a:xfrm>
+            <a:off x="1905969" y="3775832"/>
+            <a:ext cx="1003801" cy="300082"/>
+          </a:xfrm>
+          <a:prstGeom prst="rect">
+            <a:avLst/>
+          </a:prstGeom>
+          <a:noFill/>
+        </p:spPr>
+        <p:txBody>
+          <a:bodyPr wrap="none" rtlCol="0">
+            <a:spAutoFit/>
+          </a:bodyPr>
+          <a:lstStyle/>
+          <a:p>
+            <a:r>
+              <a:rPr lang="en-US" sz="1350" dirty="0"/>
+              <a:t>Within 24 h</a:t>
+            </a:r>
+          </a:p>
+        </p:txBody>
+      </p:sp>
+      <p:cxnSp>
+        <p:nvCxnSpPr>
+          <p:cNvPr id="20" name="Straight Arrow Connector 19">
+            <a:extLst>
+              <a:ext uri="{FF2B5EF4-FFF2-40B4-BE49-F238E27FC236}">
+                <a16:creationId xmlns:a16="http://schemas.microsoft.com/office/drawing/2014/main" id="{3AE8745C-FA68-33E9-AB84-083F685DDE7F}"/>
+              </a:ext>
+            </a:extLst>
+          </p:cNvPr>
+          <p:cNvCxnSpPr>
+            <a:cxnSpLocks/>
+          </p:cNvCxnSpPr>
+          <p:nvPr/>
+        </p:nvCxnSpPr>
+        <p:spPr>
+          <a:xfrm>
+            <a:off x="1508233" y="3666758"/>
+            <a:ext cx="1920767" cy="0"/>
+          </a:xfrm>
+          <a:prstGeom prst="straightConnector1">
+            <a:avLst/>
+          </a:prstGeom>
+          <a:ln w="38100">
+            <a:headEnd type="triangle"/>
+            <a:tailEnd type="triangle"/>
+          </a:ln>
+        </p:spPr>
+        <p:style>
+          <a:lnRef idx="2">
+            <a:schemeClr val="accent1"/>
+          </a:lnRef>
+          <a:fillRef idx="0">
+            <a:schemeClr val="accent1"/>
+          </a:fillRef>
+          <a:effectRef idx="1">
+            <a:schemeClr val="accent1"/>
+          </a:effectRef>
+          <a:fontRef idx="minor">
+            <a:schemeClr val="tx1"/>
+          </a:fontRef>
+        </p:style>
+      </p:cxnSp>
+      <p:sp>
+        <p:nvSpPr>
+          <p:cNvPr id="23" name="TextBox 22">
+            <a:extLst>
+              <a:ext uri="{FF2B5EF4-FFF2-40B4-BE49-F238E27FC236}">
+                <a16:creationId xmlns:a16="http://schemas.microsoft.com/office/drawing/2014/main" id="{9D421FDF-02C8-F238-7CE9-0E66375A05B2}"/>
+              </a:ext>
+            </a:extLst>
+          </p:cNvPr>
+          <p:cNvSpPr txBox="1"/>
+          <p:nvPr/>
+        </p:nvSpPr>
+        <p:spPr>
+          <a:xfrm>
+            <a:off x="6556465" y="3706582"/>
+            <a:ext cx="1003801" cy="300082"/>
+          </a:xfrm>
+          <a:prstGeom prst="rect">
+            <a:avLst/>
+          </a:prstGeom>
+          <a:noFill/>
+        </p:spPr>
+        <p:txBody>
+          <a:bodyPr wrap="none" rtlCol="0">
+            <a:spAutoFit/>
+          </a:bodyPr>
+          <a:lstStyle/>
+          <a:p>
+            <a:r>
+              <a:rPr lang="en-US" sz="1350" dirty="0"/>
+              <a:t>Within 24 h</a:t>
+            </a:r>
+          </a:p>
+        </p:txBody>
+      </p:sp>
+      <p:cxnSp>
+        <p:nvCxnSpPr>
+          <p:cNvPr id="24" name="Straight Arrow Connector 23">
+            <a:extLst>
+              <a:ext uri="{FF2B5EF4-FFF2-40B4-BE49-F238E27FC236}">
+                <a16:creationId xmlns:a16="http://schemas.microsoft.com/office/drawing/2014/main" id="{26235394-EACA-2561-14E2-C5206496B0F8}"/>
+              </a:ext>
+            </a:extLst>
+          </p:cNvPr>
+          <p:cNvCxnSpPr>
+            <a:cxnSpLocks/>
+          </p:cNvCxnSpPr>
+          <p:nvPr/>
+        </p:nvCxnSpPr>
+        <p:spPr>
+          <a:xfrm>
+            <a:off x="5990703" y="3666758"/>
+            <a:ext cx="1920767" cy="0"/>
+          </a:xfrm>
+          <a:prstGeom prst="straightConnector1">
+            <a:avLst/>
+          </a:prstGeom>
+          <a:ln w="38100">
+            <a:headEnd type="triangle"/>
+            <a:tailEnd type="triangle"/>
+          </a:ln>
+        </p:spPr>
+        <p:style>
+          <a:lnRef idx="2">
+            <a:schemeClr val="accent1"/>
+          </a:lnRef>
+          <a:fillRef idx="0">
+            <a:schemeClr val="accent1"/>
+          </a:fillRef>
+          <a:effectRef idx="1">
+            <a:schemeClr val="accent1"/>
+          </a:effectRef>
+          <a:fontRef idx="minor">
+            <a:schemeClr val="tx1"/>
+          </a:fontRef>
+        </p:style>
+      </p:cxnSp>
+    </p:spTree>
+    <p:extLst>
+      <p:ext uri="{BB962C8B-B14F-4D97-AF65-F5344CB8AC3E}">
+        <p14:creationId xmlns:p14="http://schemas.microsoft.com/office/powerpoint/2010/main" val="3255932196"/>
+      </p:ext>
+    </p:extLst>
+  </p:cSld>
+  <p:clrMapOvr>
+    <a:masterClrMapping/>
+  </p:clrMapOvr>
+</p:sld>
+</file>
+
+<file path=ppt/slides/slide5.xml><?xml version="1.0" encoding="utf-8"?>
+<p:sld xmlns:a="http://schemas.openxmlformats.org/drawingml/2006/main" xmlns:r="http://schemas.openxmlformats.org/officeDocument/2006/relationships" xmlns:p="http://schemas.openxmlformats.org/presentationml/2006/main">
+  <p:cSld>
+    <p:spTree>
+      <p:nvGrpSpPr>
+        <p:cNvPr id="1" name=""/>
+        <p:cNvGrpSpPr/>
+        <p:nvPr/>
+      </p:nvGrpSpPr>
+      <p:grpSpPr>
+        <a:xfrm>
+          <a:off x="0" y="0"/>
+          <a:ext cx="0" cy="0"/>
+          <a:chOff x="0" y="0"/>
+          <a:chExt cx="0" cy="0"/>
+        </a:xfrm>
+      </p:grpSpPr>
+      <p:sp>
+        <p:nvSpPr>
+          <p:cNvPr id="2" name="Title 1">
+            <a:extLst>
+              <a:ext uri="{FF2B5EF4-FFF2-40B4-BE49-F238E27FC236}">
+                <a16:creationId xmlns:a16="http://schemas.microsoft.com/office/drawing/2014/main" id="{26666111-2F70-7D0B-123E-01ACA4AD8932}"/>
+              </a:ext>
+            </a:extLst>
+          </p:cNvPr>
+          <p:cNvSpPr>
+            <a:spLocks noGrp="1"/>
+          </p:cNvSpPr>
+          <p:nvPr>
+            <p:ph type="title"/>
+          </p:nvPr>
+        </p:nvSpPr>
+        <p:spPr/>
+        <p:txBody>
+          <a:bodyPr/>
+          <a:lstStyle/>
+          <a:p>
+            <a:endParaRPr lang="en-US"/>
+          </a:p>
+        </p:txBody>
+      </p:sp>
+      <p:pic>
+        <p:nvPicPr>
+          <p:cNvPr id="5" name="Content Placeholder 4" descr="A screenshot of a medical report&#10;&#10;AI-generated content may be incorrect.">
+            <a:extLst>
+              <a:ext uri="{FF2B5EF4-FFF2-40B4-BE49-F238E27FC236}">
+                <a16:creationId xmlns:a16="http://schemas.microsoft.com/office/drawing/2014/main" id="{88094398-C9BB-B4D3-4D4F-024ECE53058D}"/>
+              </a:ext>
+            </a:extLst>
+          </p:cNvPr>
+          <p:cNvPicPr>
+            <a:picLocks noGrp="1" noChangeAspect="1"/>
+          </p:cNvPicPr>
+          <p:nvPr>
+            <p:ph idx="1"/>
+          </p:nvPr>
+        </p:nvPicPr>
+        <p:blipFill>
+          <a:blip r:embed="rId2"/>
+          <a:stretch>
+            <a:fillRect/>
+          </a:stretch>
+        </p:blipFill>
+        <p:spPr>
+          <a:xfrm>
+            <a:off x="1885950" y="1529358"/>
+            <a:ext cx="5372100" cy="2943225"/>
+          </a:xfrm>
+          <a:prstGeom prst="rect">
+            <a:avLst/>
+          </a:prstGeom>
+        </p:spPr>
+      </p:pic>
+    </p:spTree>
+    <p:extLst>
+      <p:ext uri="{BB962C8B-B14F-4D97-AF65-F5344CB8AC3E}">
+        <p14:creationId xmlns:p14="http://schemas.microsoft.com/office/powerpoint/2010/main" val="1755191953"/>
+      </p:ext>
+    </p:extLst>
   </p:cSld>
   <p:clrMapOvr>
     <a:masterClrMapping/>
